--- a/ipsa/slides/modules.pptx
+++ b/ipsa/slides/modules.pptx
@@ -148,7 +148,7 @@
   <pc:docChgLst>
     <pc:chgData name="Gerth Stølting Brodal" userId="04ef4784-6591-4f86-a140-f5c3b108582a" providerId="ADAL" clId="{73BAC7D6-516A-44B5-B4B0-C7B08CA8B392}"/>
     <pc:docChg chg="undo custSel modSld">
-      <pc:chgData name="Gerth Stølting Brodal" userId="04ef4784-6591-4f86-a140-f5c3b108582a" providerId="ADAL" clId="{73BAC7D6-516A-44B5-B4B0-C7B08CA8B392}" dt="2026-04-19T20:48:52.373" v="593" actId="20577"/>
+      <pc:chgData name="Gerth Stølting Brodal" userId="04ef4784-6591-4f86-a140-f5c3b108582a" providerId="ADAL" clId="{73BAC7D6-516A-44B5-B4B0-C7B08CA8B392}" dt="2026-04-20T10:55:07.503" v="605" actId="207"/>
       <pc:docMkLst>
         <pc:docMk/>
       </pc:docMkLst>
@@ -262,7 +262,7 @@
         </pc:graphicFrameChg>
       </pc:sldChg>
       <pc:sldChg chg="modSp mod">
-        <pc:chgData name="Gerth Stølting Brodal" userId="04ef4784-6591-4f86-a140-f5c3b108582a" providerId="ADAL" clId="{73BAC7D6-516A-44B5-B4B0-C7B08CA8B392}" dt="2026-04-19T20:05:53.345" v="266" actId="207"/>
+        <pc:chgData name="Gerth Stølting Brodal" userId="04ef4784-6591-4f86-a140-f5c3b108582a" providerId="ADAL" clId="{73BAC7D6-516A-44B5-B4B0-C7B08CA8B392}" dt="2026-04-20T10:55:07.503" v="605" actId="207"/>
         <pc:sldMkLst>
           <pc:docMk/>
           <pc:sldMk cId="1385633794" sldId="737"/>
@@ -284,7 +284,7 @@
           </ac:spMkLst>
         </pc:spChg>
         <pc:graphicFrameChg chg="modGraphic">
-          <ac:chgData name="Gerth Stølting Brodal" userId="04ef4784-6591-4f86-a140-f5c3b108582a" providerId="ADAL" clId="{73BAC7D6-516A-44B5-B4B0-C7B08CA8B392}" dt="2026-04-19T20:05:29.535" v="262" actId="207"/>
+          <ac:chgData name="Gerth Stølting Brodal" userId="04ef4784-6591-4f86-a140-f5c3b108582a" providerId="ADAL" clId="{73BAC7D6-516A-44B5-B4B0-C7B08CA8B392}" dt="2026-04-20T10:55:07.503" v="605" actId="207"/>
           <ac:graphicFrameMkLst>
             <pc:docMk/>
             <pc:sldMk cId="1385633794" sldId="737"/>
@@ -1090,7 +1090,7 @@
           <a:p>
             <a:fld id="{FB1A172F-81D4-4DC4-9113-1DBD56EC3646}" type="datetimeFigureOut">
               <a:rPr lang="en-US" smtClean="0"/>
-              <a:t>4/19/2026</a:t>
+              <a:t>4/20/2026</a:t>
             </a:fld>
             <a:endParaRPr lang="en-US"/>
           </a:p>
@@ -2699,7 +2699,7 @@
           <a:p>
             <a:fld id="{0560A9CD-0304-4E0B-9E82-E7E0115DE05B}" type="datetimeFigureOut">
               <a:rPr lang="en-US" smtClean="0"/>
-              <a:t>4/19/2026</a:t>
+              <a:t>4/20/2026</a:t>
             </a:fld>
             <a:endParaRPr lang="en-US"/>
           </a:p>
@@ -2867,7 +2867,7 @@
           <a:p>
             <a:fld id="{0560A9CD-0304-4E0B-9E82-E7E0115DE05B}" type="datetimeFigureOut">
               <a:rPr lang="en-US" smtClean="0"/>
-              <a:t>4/19/2026</a:t>
+              <a:t>4/20/2026</a:t>
             </a:fld>
             <a:endParaRPr lang="en-US"/>
           </a:p>
@@ -3045,7 +3045,7 @@
           <a:p>
             <a:fld id="{0560A9CD-0304-4E0B-9E82-E7E0115DE05B}" type="datetimeFigureOut">
               <a:rPr lang="en-US" smtClean="0"/>
-              <a:t>4/19/2026</a:t>
+              <a:t>4/20/2026</a:t>
             </a:fld>
             <a:endParaRPr lang="en-US"/>
           </a:p>
@@ -3228,7 +3228,7 @@
           <a:p>
             <a:fld id="{0560A9CD-0304-4E0B-9E82-E7E0115DE05B}" type="datetimeFigureOut">
               <a:rPr lang="en-US" smtClean="0"/>
-              <a:t>4/19/2026</a:t>
+              <a:t>4/20/2026</a:t>
             </a:fld>
             <a:endParaRPr lang="en-US"/>
           </a:p>
@@ -3473,7 +3473,7 @@
           <a:p>
             <a:fld id="{0560A9CD-0304-4E0B-9E82-E7E0115DE05B}" type="datetimeFigureOut">
               <a:rPr lang="en-US" smtClean="0"/>
-              <a:t>4/19/2026</a:t>
+              <a:t>4/20/2026</a:t>
             </a:fld>
             <a:endParaRPr lang="en-US"/>
           </a:p>
@@ -3702,7 +3702,7 @@
           <a:p>
             <a:fld id="{0560A9CD-0304-4E0B-9E82-E7E0115DE05B}" type="datetimeFigureOut">
               <a:rPr lang="en-US" smtClean="0"/>
-              <a:t>4/19/2026</a:t>
+              <a:t>4/20/2026</a:t>
             </a:fld>
             <a:endParaRPr lang="en-US"/>
           </a:p>
@@ -4066,7 +4066,7 @@
           <a:p>
             <a:fld id="{0560A9CD-0304-4E0B-9E82-E7E0115DE05B}" type="datetimeFigureOut">
               <a:rPr lang="en-US" smtClean="0"/>
-              <a:t>4/19/2026</a:t>
+              <a:t>4/20/2026</a:t>
             </a:fld>
             <a:endParaRPr lang="en-US"/>
           </a:p>
@@ -4183,7 +4183,7 @@
           <a:p>
             <a:fld id="{0560A9CD-0304-4E0B-9E82-E7E0115DE05B}" type="datetimeFigureOut">
               <a:rPr lang="en-US" smtClean="0"/>
-              <a:t>4/19/2026</a:t>
+              <a:t>4/20/2026</a:t>
             </a:fld>
             <a:endParaRPr lang="en-US"/>
           </a:p>
@@ -4278,7 +4278,7 @@
           <a:p>
             <a:fld id="{0560A9CD-0304-4E0B-9E82-E7E0115DE05B}" type="datetimeFigureOut">
               <a:rPr lang="en-US" smtClean="0"/>
-              <a:t>4/19/2026</a:t>
+              <a:t>4/20/2026</a:t>
             </a:fld>
             <a:endParaRPr lang="en-US"/>
           </a:p>
@@ -4553,7 +4553,7 @@
           <a:p>
             <a:fld id="{0560A9CD-0304-4E0B-9E82-E7E0115DE05B}" type="datetimeFigureOut">
               <a:rPr lang="en-US" smtClean="0"/>
-              <a:t>4/19/2026</a:t>
+              <a:t>4/20/2026</a:t>
             </a:fld>
             <a:endParaRPr lang="en-US"/>
           </a:p>
@@ -4805,7 +4805,7 @@
           <a:p>
             <a:fld id="{0560A9CD-0304-4E0B-9E82-E7E0115DE05B}" type="datetimeFigureOut">
               <a:rPr lang="en-US" smtClean="0"/>
-              <a:t>4/19/2026</a:t>
+              <a:t>4/20/2026</a:t>
             </a:fld>
             <a:endParaRPr lang="en-US"/>
           </a:p>
@@ -5016,7 +5016,7 @@
           <a:p>
             <a:fld id="{0560A9CD-0304-4E0B-9E82-E7E0115DE05B}" type="datetimeFigureOut">
               <a:rPr lang="en-US" smtClean="0"/>
-              <a:t>4/19/2026</a:t>
+              <a:t>4/20/2026</a:t>
             </a:fld>
             <a:endParaRPr lang="en-US"/>
           </a:p>
@@ -25562,7 +25562,7 @@
           <p:nvPr>
             <p:extLst>
               <p:ext uri="{D42A27DB-BD31-4B8C-83A1-F6EECF244321}">
-                <p14:modId xmlns:p14="http://schemas.microsoft.com/office/powerpoint/2010/main" val="3594045912"/>
+                <p14:modId xmlns:p14="http://schemas.microsoft.com/office/powerpoint/2010/main" val="3954536513"/>
               </p:ext>
             </p:extLst>
           </p:nvPr>
@@ -26033,12 +26033,14 @@
                       <a:r>
                         <a:rPr lang="en-US" sz="1400" b="1" baseline="0" noProof="0" dirty="0">
                           <a:solidFill>
-                            <a:srgbClr val="C00000"/>
-                          </a:solidFill>
-                          <a:latin typeface="Courier New" panose="02070309020205020404" pitchFamily="49" charset="0"/>
-                          <a:cs typeface="Courier New" panose="02070309020205020404" pitchFamily="49" charset="0"/>
-                        </a:rPr>
-                        <a:t>__name__ = __main__</a:t>
+                            <a:schemeClr val="accent1">
+                              <a:lumMod val="50000"/>
+                            </a:schemeClr>
+                          </a:solidFill>
+                          <a:latin typeface="Courier New" panose="02070309020205020404" pitchFamily="49" charset="0"/>
+                          <a:cs typeface="Courier New" panose="02070309020205020404" pitchFamily="49" charset="0"/>
+                        </a:rPr>
+                        <a:t>__name__ = '__main__'</a:t>
                       </a:r>
                       <a:br>
                         <a:rPr lang="en-US" sz="1400" b="1" baseline="0" noProof="0" dirty="0">
